--- a/ppt/cloud_attack_path_analysis_presentation.pptx
+++ b/ppt/cloud_attack_path_analysis_presentation.pptx
@@ -3995,7 +3995,7 @@
         </p:nvSpPr>
         <p:spPr>
           <a:xfrm>
-            <a:off x="5486400" y="-914400"/>
+            <a:off x="4469130" y="451989"/>
             <a:ext cx="2743200" cy="2743200"/>
           </a:xfrm>
           <a:prstGeom prst="ellipse">
@@ -4039,7 +4039,7 @@
         </p:nvSpPr>
         <p:spPr>
           <a:xfrm>
-            <a:off x="6858000" y="-457200"/>
+            <a:off x="5971917" y="1600200"/>
             <a:ext cx="2286000" cy="2286000"/>
           </a:xfrm>
           <a:prstGeom prst="ellipse">
@@ -4071,7 +4071,7 @@
           <a:lstStyle/>
           <a:p>
             <a:pPr algn="ctr"/>
-            <a:endParaRPr/>
+            <a:endParaRPr dirty="0"/>
           </a:p>
         </p:txBody>
       </p:sp>
@@ -4083,7 +4083,7 @@
         </p:nvSpPr>
         <p:spPr>
           <a:xfrm>
-            <a:off x="8229600" y="0"/>
+            <a:off x="7415784" y="2606040"/>
             <a:ext cx="1828800" cy="1828800"/>
           </a:xfrm>
           <a:prstGeom prst="ellipse">
@@ -4171,7 +4171,7 @@
         </p:nvSpPr>
         <p:spPr>
           <a:xfrm>
-            <a:off x="640080" y="1828800"/>
+            <a:off x="603504" y="2057400"/>
             <a:ext cx="7772400" cy="1371600"/>
           </a:xfrm>
           <a:prstGeom prst="rect">
@@ -4292,8 +4292,8 @@
         </p:nvSpPr>
         <p:spPr>
           <a:xfrm>
-            <a:off x="640080" y="6217920"/>
-            <a:ext cx="7772400" cy="365760"/>
+            <a:off x="640080" y="6186367"/>
+            <a:ext cx="2636427" cy="276999"/>
           </a:xfrm>
           <a:prstGeom prst="rect">
             <a:avLst/>
@@ -4315,7 +4315,61 @@
               </a:defRPr>
             </a:pPr>
             <a:r>
+              <a:rPr dirty="0">
+                <a:solidFill>
+                  <a:schemeClr val="bg1"/>
+                </a:solidFill>
+              </a:rPr>
               <a:t>Research Project Presentation | 2026</a:t>
+            </a:r>
+          </a:p>
+        </p:txBody>
+      </p:sp>
+      <p:sp>
+        <p:nvSpPr>
+          <p:cNvPr id="30" name="TextBox 29">
+            <a:extLst>
+              <a:ext uri="{FF2B5EF4-FFF2-40B4-BE49-F238E27FC236}">
+                <a16:creationId xmlns:a16="http://schemas.microsoft.com/office/drawing/2014/main" id="{5C6076E3-AB47-97CA-A55F-7B31D3530BEE}"/>
+              </a:ext>
+            </a:extLst>
+          </p:cNvPr>
+          <p:cNvSpPr txBox="1"/>
+          <p:nvPr/>
+        </p:nvSpPr>
+        <p:spPr>
+          <a:xfrm>
+            <a:off x="640080" y="5848588"/>
+            <a:ext cx="2222091" cy="461665"/>
+          </a:xfrm>
+          <a:prstGeom prst="rect">
+            <a:avLst/>
+          </a:prstGeom>
+          <a:noFill/>
+        </p:spPr>
+        <p:txBody>
+          <a:bodyPr wrap="square" rtlCol="0">
+            <a:spAutoFit/>
+          </a:bodyPr>
+          <a:lstStyle/>
+          <a:p>
+            <a:r>
+              <a:rPr lang="en-IN" sz="1200" dirty="0">
+                <a:solidFill>
+                  <a:schemeClr val="bg1"/>
+                </a:solidFill>
+              </a:rPr>
+              <a:t>Name - Shaurya Verma </a:t>
+            </a:r>
+          </a:p>
+          <a:p>
+            <a:r>
+              <a:rPr lang="en-IN" sz="1200" dirty="0">
+                <a:solidFill>
+                  <a:schemeClr val="bg1"/>
+                </a:solidFill>
+              </a:rPr>
+              <a:t>Rollo no - 25475</a:t>
             </a:r>
           </a:p>
         </p:txBody>
